--- a/Pillar1-Behaviour-and-Climate-facilitator-deck.pptx
+++ b/Pillar1-Behaviour-and-Climate-facilitator-deck.pptx
@@ -5382,7 +5382,7 @@
                 <a:ea typeface="Century Gothic" pitchFamily="34" charset="-122"/>
                 <a:cs typeface="Century Gothic" pitchFamily="34" charset="-120"/>
               </a:rPr>
-              <a:t>Consistency is the inclusion</a:t>
+              <a:t>Why consistency matters most for some pupils</a:t>
             </a:r>
             <a:endParaRPr lang="en-US" sz="2700" dirty="0"/>
           </a:p>
@@ -7253,7 +7253,7 @@
                 <a:ea typeface="Century Gothic" pitchFamily="34" charset="-122"/>
                 <a:cs typeface="Century Gothic" pitchFamily="34" charset="-120"/>
               </a:rPr>
-              <a:t>Subject teams</a:t>
+              <a:t>Class teams</a:t>
             </a:r>
             <a:endParaRPr lang="en-US" sz="1350" dirty="0"/>
           </a:p>
@@ -7273,7 +7273,7 @@
                 <a:ea typeface="Century Gothic" pitchFamily="34" charset="-122"/>
                 <a:cs typeface="Century Gothic" pitchFamily="34" charset="-120"/>
               </a:rPr>
-              <a:t>adapting each method to the subject</a:t>
+              <a:t>adapting each method to your class</a:t>
             </a:r>
             <a:endParaRPr lang="en-US" sz="1350" dirty="0"/>
           </a:p>
@@ -8133,7 +8133,7 @@
                 <a:ea typeface="Century Gothic" pitchFamily="34" charset="-122"/>
                 <a:cs typeface="Century Gothic" pitchFamily="34" charset="-120"/>
               </a:rPr>
-              <a:t>The first five minutes decide the hour</a:t>
+              <a:t>How a lesson starts</a:t>
             </a:r>
             <a:endParaRPr lang="en-US" sz="2700" dirty="0"/>
           </a:p>
@@ -8241,7 +8241,7 @@
                 <a:ea typeface="Century Gothic" pitchFamily="34" charset="-122"/>
                 <a:cs typeface="Century Gothic" pitchFamily="34" charset="-120"/>
               </a:rPr>
-              <a:t>A lesson that opens with drift</a:t>
+              <a:t>When the start is left to chance</a:t>
             </a:r>
             <a:endParaRPr lang="en-US" sz="1600" dirty="0"/>
           </a:p>
@@ -8455,7 +8455,7 @@
                 <a:ea typeface="Century Gothic" pitchFamily="34" charset="-122"/>
                 <a:cs typeface="Century Gothic" pitchFamily="34" charset="-120"/>
               </a:rPr>
-              <a:t>A lesson that opens with purpose</a:t>
+              <a:t>When the start is planned</a:t>
             </a:r>
             <a:endParaRPr lang="en-US" sz="1600" dirty="0"/>
           </a:p>
@@ -8847,7 +8847,7 @@
                 <a:ea typeface="Century Gothic" pitchFamily="34" charset="-122"/>
                 <a:cs typeface="Century Gothic" pitchFamily="34" charset="-120"/>
               </a:rPr>
-              <a:t>Good behaviour is not the absence of trouble. It is the presence of a culture — and culture is taught.</a:t>
+              <a:t>A calm, purposeful classroom is built deliberately. The routines are taught and kept up, like anything else pupils learn.</a:t>
             </a:r>
             <a:endParaRPr lang="en-US" sz="3000" dirty="0"/>
           </a:p>
@@ -8886,7 +8886,7 @@
                 <a:ea typeface="Century Gothic" pitchFamily="34" charset="-122"/>
                 <a:cs typeface="Century Gothic" pitchFamily="34" charset="-120"/>
               </a:rPr>
-              <a:t>What you permit, you promote.  </a:t>
+              <a:t>If a routine is not kept up, pupils learn it can be ignored.  </a:t>
             </a:r>
             <a:pPr indent="0" marL="0">
               <a:buNone/>
@@ -9056,7 +9056,7 @@
                 <a:ea typeface="Century Gothic" pitchFamily="34" charset="-122"/>
                 <a:cs typeface="Century Gothic" pitchFamily="34" charset="-120"/>
               </a:rPr>
-              <a:t>Four routines that carry the pillar</a:t>
+              <a:t>Four core routines</a:t>
             </a:r>
             <a:endParaRPr lang="en-US" sz="2700" dirty="0"/>
           </a:p>
@@ -10582,7 +10582,7 @@
                 <a:ea typeface="Century Gothic" pitchFamily="34" charset="-122"/>
                 <a:cs typeface="Century Gothic" pitchFamily="34" charset="-120"/>
               </a:rPr>
-              <a:t>One calm climate, across the lesson</a:t>
+              <a:t>The routines across a lesson</a:t>
             </a:r>
             <a:endParaRPr lang="en-US" sz="2700" dirty="0"/>
           </a:p>

--- a/Pillar1-Behaviour-and-Climate-facilitator-deck.pptx
+++ b/Pillar1-Behaviour-and-Climate-facilitator-deck.pptx
@@ -12035,7 +12035,7 @@
     </a:clrScheme>
     <a:fontScheme name="Office">
       <a:majorFont>
-        <a:latin typeface="Calibri Light" panose="020F0302020204030204"/>
+        <a:latin typeface="Century Gothic" panose="020F0302020204030204"/>
         <a:ea typeface=""/>
         <a:cs typeface=""/>
         <a:font script="Jpan" typeface="游ゴシック Light"/>
@@ -12087,7 +12087,7 @@
         <a:font script="Tfng" typeface="Ebrima"/>
       </a:majorFont>
       <a:minorFont>
-        <a:latin typeface="Calibri" panose="020F0502020204030204"/>
+        <a:latin typeface="Century Gothic" panose="020F0502020204030204"/>
         <a:ea typeface=""/>
         <a:cs typeface=""/>
         <a:font script="Jpan" typeface="游ゴシック"/>
